--- a/output/presentation/techflow-grounded-responses.pptx
+++ b/output/presentation/techflow-grounded-responses.pptx
@@ -2,22 +2,22 @@
 <file path=ppt/presentation.xml><?xml version="1.0" encoding="utf-8"?>
 <p:presentation xmlns:p="http://schemas.openxmlformats.org/presentationml/2006/main">
   <p:sldMasterIdLst>
-    <p:sldMasterId xmlns:r="http://schemas.openxmlformats.org/officeDocument/2006/relationships" id="2147483648" r:id="R46314f0022774ee7"/>
+    <p:sldMasterId xmlns:r="http://schemas.openxmlformats.org/officeDocument/2006/relationships" id="2147483648" r:id="R69e3a867b4904981"/>
   </p:sldMasterIdLst>
   <p:notesMasterIdLst>
-    <p:notesMasterId xmlns:r="http://schemas.openxmlformats.org/officeDocument/2006/relationships" r:id="Rd67a91db941b43d3"/>
+    <p:notesMasterId xmlns:r="http://schemas.openxmlformats.org/officeDocument/2006/relationships" r:id="R3bd9950ec8ec4056"/>
   </p:notesMasterIdLst>
   <p:sldIdLst>
-    <p:sldId xmlns:r="http://schemas.openxmlformats.org/officeDocument/2006/relationships" id="256" r:id="Rd25607a8a9524aa2"/>
-    <p:sldId xmlns:r="http://schemas.openxmlformats.org/officeDocument/2006/relationships" id="257" r:id="Rc12bdd4bdc674b1d"/>
-    <p:sldId xmlns:r="http://schemas.openxmlformats.org/officeDocument/2006/relationships" id="258" r:id="Ra7592a87fa0b4358"/>
-    <p:sldId xmlns:r="http://schemas.openxmlformats.org/officeDocument/2006/relationships" id="259" r:id="R90a4e84a5f294603"/>
-    <p:sldId xmlns:r="http://schemas.openxmlformats.org/officeDocument/2006/relationships" id="260" r:id="R3bbfa6c0e50d40d4"/>
-    <p:sldId xmlns:r="http://schemas.openxmlformats.org/officeDocument/2006/relationships" id="261" r:id="Rdc60e003ae304a87"/>
-    <p:sldId xmlns:r="http://schemas.openxmlformats.org/officeDocument/2006/relationships" id="262" r:id="Re089d67f360e4176"/>
-    <p:sldId xmlns:r="http://schemas.openxmlformats.org/officeDocument/2006/relationships" id="263" r:id="R089ecc6aefdb4019"/>
-    <p:sldId xmlns:r="http://schemas.openxmlformats.org/officeDocument/2006/relationships" id="264" r:id="R29d04c1ad49d4d30"/>
-    <p:sldId xmlns:r="http://schemas.openxmlformats.org/officeDocument/2006/relationships" id="265" r:id="R72970f8ebd8149f7"/>
+    <p:sldId xmlns:r="http://schemas.openxmlformats.org/officeDocument/2006/relationships" id="256" r:id="R570415c3ad684202"/>
+    <p:sldId xmlns:r="http://schemas.openxmlformats.org/officeDocument/2006/relationships" id="257" r:id="R98ae361c9c2b467f"/>
+    <p:sldId xmlns:r="http://schemas.openxmlformats.org/officeDocument/2006/relationships" id="258" r:id="Rfc96d73bb99843af"/>
+    <p:sldId xmlns:r="http://schemas.openxmlformats.org/officeDocument/2006/relationships" id="259" r:id="Rbeaf9df56a0041b6"/>
+    <p:sldId xmlns:r="http://schemas.openxmlformats.org/officeDocument/2006/relationships" id="260" r:id="R71b09b41bd5b4b89"/>
+    <p:sldId xmlns:r="http://schemas.openxmlformats.org/officeDocument/2006/relationships" id="261" r:id="R525b25d332274d16"/>
+    <p:sldId xmlns:r="http://schemas.openxmlformats.org/officeDocument/2006/relationships" id="262" r:id="R3b062fc1f4194646"/>
+    <p:sldId xmlns:r="http://schemas.openxmlformats.org/officeDocument/2006/relationships" id="263" r:id="R94d708be510040fe"/>
+    <p:sldId xmlns:r="http://schemas.openxmlformats.org/officeDocument/2006/relationships" id="264" r:id="R899f8da495b347c5"/>
+    <p:sldId xmlns:r="http://schemas.openxmlformats.org/officeDocument/2006/relationships" id="265" r:id="R4b7b61913f294b44"/>
   </p:sldIdLst>
   <p:sldSz cx="12192000" cy="6858000"/>
   <p:notesSz cx="6858000" cy="9144000"/>
@@ -1229,7 +1229,7 @@
   </p:cSld>
   <p:clrMap bg1="lt1" tx1="dk1" bg2="lt2" tx2="dk2" accent1="accent1" accent2="accent2" accent3="accent3" accent4="accent4" accent5="accent5" accent6="accent6" hlink="hlink" folHlink="folHlink"/>
   <p:sldLayoutIdLst>
-    <p:sldLayoutId xmlns:r="http://schemas.openxmlformats.org/officeDocument/2006/relationships" id="2147483649" r:id="Rfd34246105234b65"/>
+    <p:sldLayoutId xmlns:r="http://schemas.openxmlformats.org/officeDocument/2006/relationships" id="2147483649" r:id="R5adaff8aa5ea4568"/>
   </p:sldLayoutIdLst>
   <p:txStyles>
     <p:titleStyle>
@@ -1773,7 +1773,7 @@
           <p:cNvPr id="4" name="Title-3-1">
             <a:extLst xmlns:a="http://schemas.openxmlformats.org/drawingml/2006/main">
               <a:ext uri="{FF2B5EF4-FFF2-40B4-BE49-F238E27FC236}">
-                <a16:creationId xmlns:a16="http://schemas.microsoft.com/office/drawing/2014/main" id="{BFF3B903-A86A-413A-92AA-BB4834D4D659}"/>
+                <a16:creationId xmlns:a16="http://schemas.microsoft.com/office/drawing/2014/main" id="{5309FBA5-3BC3-4F87-A9DE-5D80ACED4391}"/>
               </a:ext>
             </a:extLst>
           </p:cNvPr>
@@ -1819,7 +1819,7 @@
           <p:cNvPr id="2" name="Subtitle-4-2">
             <a:extLst xmlns:a="http://schemas.openxmlformats.org/drawingml/2006/main">
               <a:ext uri="{FF2B5EF4-FFF2-40B4-BE49-F238E27FC236}">
-                <a16:creationId xmlns:a16="http://schemas.microsoft.com/office/drawing/2014/main" id="{1D21EB68-ACC0-489A-8745-2D93717CA6B9}"/>
+                <a16:creationId xmlns:a16="http://schemas.microsoft.com/office/drawing/2014/main" id="{8175782E-1E22-4554-933F-23A92C0CA54A}"/>
               </a:ext>
             </a:extLst>
           </p:cNvPr>
@@ -1864,7 +1864,7 @@
           <p:cNvPr id="3" name="Subtitle-4-3">
             <a:extLst xmlns:a="http://schemas.openxmlformats.org/drawingml/2006/main">
               <a:ext uri="{FF2B5EF4-FFF2-40B4-BE49-F238E27FC236}">
-                <a16:creationId xmlns:a16="http://schemas.microsoft.com/office/drawing/2014/main" id="{087A9D1E-2846-487E-BC98-D275B9A55F6D}"/>
+                <a16:creationId xmlns:a16="http://schemas.microsoft.com/office/drawing/2014/main" id="{1E5BCAA9-AA07-4A81-800B-B9A7894454D2}"/>
               </a:ext>
             </a:extLst>
           </p:cNvPr>
@@ -1907,7 +1907,7 @@
     </p:spTree>
     <p:extLst>
       <p:ext uri="{BB962C8B-B14F-4D97-AF65-F5344CB8AC3E}">
-        <p14:creationId xmlns:p14="http://schemas.microsoft.com/office/powerpoint/2010/main" val="1411266738"/>
+        <p14:creationId xmlns:p14="http://schemas.microsoft.com/office/powerpoint/2010/main" val="487143175"/>
       </p:ext>
     </p:extLst>
   </p:cSld>
@@ -1931,7 +1931,7 @@
           <p:cNvPr id="4" name="Title-3-1">
             <a:extLst xmlns:a="http://schemas.openxmlformats.org/drawingml/2006/main">
               <a:ext uri="{FF2B5EF4-FFF2-40B4-BE49-F238E27FC236}">
-                <a16:creationId xmlns:a16="http://schemas.microsoft.com/office/drawing/2014/main" id="{2D87C313-9BF1-42AA-997D-F1AE89B3C4AA}"/>
+                <a16:creationId xmlns:a16="http://schemas.microsoft.com/office/drawing/2014/main" id="{53D8BF3B-FAC3-416E-942F-64C022DF6C0D}"/>
               </a:ext>
             </a:extLst>
           </p:cNvPr>
@@ -1976,7 +1976,7 @@
           <p:cNvPr id="2" name="Subtitle-4-2">
             <a:extLst xmlns:a="http://schemas.openxmlformats.org/drawingml/2006/main">
               <a:ext uri="{FF2B5EF4-FFF2-40B4-BE49-F238E27FC236}">
-                <a16:creationId xmlns:a16="http://schemas.microsoft.com/office/drawing/2014/main" id="{AF9FE812-F431-40A0-86E4-A91C06631BA5}"/>
+                <a16:creationId xmlns:a16="http://schemas.microsoft.com/office/drawing/2014/main" id="{96F547C3-8DBA-4173-AEE4-50FBC0528904}"/>
               </a:ext>
             </a:extLst>
           </p:cNvPr>
@@ -2051,7 +2051,7 @@
           <p:cNvPr id="3" name="Subtitle-4-3">
             <a:extLst xmlns:a="http://schemas.openxmlformats.org/drawingml/2006/main">
               <a:ext uri="{FF2B5EF4-FFF2-40B4-BE49-F238E27FC236}">
-                <a16:creationId xmlns:a16="http://schemas.microsoft.com/office/drawing/2014/main" id="{93D03480-72CA-4934-8D54-B57714445865}"/>
+                <a16:creationId xmlns:a16="http://schemas.microsoft.com/office/drawing/2014/main" id="{4275E123-F37A-42E8-BC99-23C4633E02D1}"/>
               </a:ext>
             </a:extLst>
           </p:cNvPr>
@@ -2094,7 +2094,7 @@
     </p:spTree>
     <p:extLst>
       <p:ext uri="{BB962C8B-B14F-4D97-AF65-F5344CB8AC3E}">
-        <p14:creationId xmlns:p14="http://schemas.microsoft.com/office/powerpoint/2010/main" val="1359187278"/>
+        <p14:creationId xmlns:p14="http://schemas.microsoft.com/office/powerpoint/2010/main" val="2093497776"/>
       </p:ext>
     </p:extLst>
   </p:cSld>
@@ -2118,7 +2118,7 @@
           <p:cNvPr id="4" name="Title-3-1">
             <a:extLst xmlns:a="http://schemas.openxmlformats.org/drawingml/2006/main">
               <a:ext uri="{FF2B5EF4-FFF2-40B4-BE49-F238E27FC236}">
-                <a16:creationId xmlns:a16="http://schemas.microsoft.com/office/drawing/2014/main" id="{B856E189-77DD-4A7E-B8A4-A7DD10B45D0E}"/>
+                <a16:creationId xmlns:a16="http://schemas.microsoft.com/office/drawing/2014/main" id="{6C56A4CF-7CAE-4C15-88D8-ACB77104F767}"/>
               </a:ext>
             </a:extLst>
           </p:cNvPr>
@@ -2164,7 +2164,7 @@
           <p:cNvPr id="2" name="Subtitle-4-2">
             <a:extLst xmlns:a="http://schemas.openxmlformats.org/drawingml/2006/main">
               <a:ext uri="{FF2B5EF4-FFF2-40B4-BE49-F238E27FC236}">
-                <a16:creationId xmlns:a16="http://schemas.microsoft.com/office/drawing/2014/main" id="{94DAC4D2-AF5E-4AF3-A0CA-CBCFCB3C7755}"/>
+                <a16:creationId xmlns:a16="http://schemas.microsoft.com/office/drawing/2014/main" id="{E5D17CA9-3BBB-4162-B958-0049137F650B}"/>
               </a:ext>
             </a:extLst>
           </p:cNvPr>
@@ -2209,7 +2209,7 @@
           <p:cNvPr id="3" name="Subtitle-4-3">
             <a:extLst xmlns:a="http://schemas.openxmlformats.org/drawingml/2006/main">
               <a:ext uri="{FF2B5EF4-FFF2-40B4-BE49-F238E27FC236}">
-                <a16:creationId xmlns:a16="http://schemas.microsoft.com/office/drawing/2014/main" id="{165FD993-77BC-4FEA-9E9F-BFBEE7225995}"/>
+                <a16:creationId xmlns:a16="http://schemas.microsoft.com/office/drawing/2014/main" id="{CFEFA65C-4073-441A-B59B-F3464BBC6D32}"/>
               </a:ext>
             </a:extLst>
           </p:cNvPr>
@@ -2252,7 +2252,7 @@
     </p:spTree>
     <p:extLst>
       <p:ext uri="{BB962C8B-B14F-4D97-AF65-F5344CB8AC3E}">
-        <p14:creationId xmlns:p14="http://schemas.microsoft.com/office/powerpoint/2010/main" val="497764063"/>
+        <p14:creationId xmlns:p14="http://schemas.microsoft.com/office/powerpoint/2010/main" val="369354898"/>
       </p:ext>
     </p:extLst>
   </p:cSld>
@@ -2276,7 +2276,7 @@
           <p:cNvPr id="13" name="Slide-Number-Placeholder-3-2">
             <a:extLst xmlns:a="http://schemas.openxmlformats.org/drawingml/2006/main">
               <a:ext uri="{FF2B5EF4-FFF2-40B4-BE49-F238E27FC236}">
-                <a16:creationId xmlns:a16="http://schemas.microsoft.com/office/drawing/2014/main" id="{8EDBB9FC-05F8-464E-AF98-A0A7E83F902A}"/>
+                <a16:creationId xmlns:a16="http://schemas.microsoft.com/office/drawing/2014/main" id="{E0C3AD3F-2716-4D65-BF26-B183C5805216}"/>
               </a:ext>
             </a:extLst>
           </p:cNvPr>
@@ -2319,7 +2319,7 @@
           <p:cNvPr id="2" name="Title-10-3">
             <a:extLst xmlns:a="http://schemas.openxmlformats.org/drawingml/2006/main">
               <a:ext uri="{FF2B5EF4-FFF2-40B4-BE49-F238E27FC236}">
-                <a16:creationId xmlns:a16="http://schemas.microsoft.com/office/drawing/2014/main" id="{8A2DA045-EF87-41E9-BD24-73D55904556B}"/>
+                <a16:creationId xmlns:a16="http://schemas.microsoft.com/office/drawing/2014/main" id="{DF268D48-5F6E-468B-9736-83A4D9A47D59}"/>
               </a:ext>
             </a:extLst>
           </p:cNvPr>
@@ -2386,7 +2386,7 @@
           <p:cNvPr id="4" name="Google-Shape-2260-p159-5">
             <a:extLst xmlns:a="http://schemas.openxmlformats.org/drawingml/2006/main">
               <a:ext uri="{FF2B5EF4-FFF2-40B4-BE49-F238E27FC236}">
-                <a16:creationId xmlns:a16="http://schemas.microsoft.com/office/drawing/2014/main" id="{3403BCBC-ABC5-401B-84E5-90DD47593FE0}"/>
+                <a16:creationId xmlns:a16="http://schemas.microsoft.com/office/drawing/2014/main" id="{11FDE01C-49FF-4833-B115-9CFD769E7939}"/>
               </a:ext>
             </a:extLst>
           </p:cNvPr>
@@ -2413,7 +2413,7 @@
           <p:cNvPr id="5" name="Google-Shape-2261-p159-6">
             <a:extLst xmlns:a="http://schemas.openxmlformats.org/drawingml/2006/main">
               <a:ext uri="{FF2B5EF4-FFF2-40B4-BE49-F238E27FC236}">
-                <a16:creationId xmlns:a16="http://schemas.microsoft.com/office/drawing/2014/main" id="{B888FC87-73BD-4DE6-90B4-40C23C9C8556}"/>
+                <a16:creationId xmlns:a16="http://schemas.microsoft.com/office/drawing/2014/main" id="{C4FD8524-A5FA-49B2-9EF6-5A6E49F8F265}"/>
               </a:ext>
             </a:extLst>
           </p:cNvPr>
@@ -2440,7 +2440,7 @@
           <p:cNvPr id="6" name="Google-Shape-2262-p159-7">
             <a:extLst xmlns:a="http://schemas.openxmlformats.org/drawingml/2006/main">
               <a:ext uri="{FF2B5EF4-FFF2-40B4-BE49-F238E27FC236}">
-                <a16:creationId xmlns:a16="http://schemas.microsoft.com/office/drawing/2014/main" id="{AC73EF7D-3D1F-4BD2-87E8-C59DD9FF6B75}"/>
+                <a16:creationId xmlns:a16="http://schemas.microsoft.com/office/drawing/2014/main" id="{71855CD1-FD48-4A51-93B2-3A5421DE0E0D}"/>
               </a:ext>
             </a:extLst>
           </p:cNvPr>
@@ -2467,7 +2467,7 @@
           <p:cNvPr id="7" name="Content-Placeholder-15-8">
             <a:extLst xmlns:a="http://schemas.openxmlformats.org/drawingml/2006/main">
               <a:ext uri="{FF2B5EF4-FFF2-40B4-BE49-F238E27FC236}">
-                <a16:creationId xmlns:a16="http://schemas.microsoft.com/office/drawing/2014/main" id="{C425B210-F2D8-498D-B134-D39DF350B02F}"/>
+                <a16:creationId xmlns:a16="http://schemas.microsoft.com/office/drawing/2014/main" id="{8421977C-60BE-41A7-970F-7F0593536EA8}"/>
               </a:ext>
             </a:extLst>
           </p:cNvPr>
@@ -2512,7 +2512,7 @@
           <p:cNvPr id="8" name="Content-Placeholder-15-9">
             <a:extLst xmlns:a="http://schemas.openxmlformats.org/drawingml/2006/main">
               <a:ext uri="{FF2B5EF4-FFF2-40B4-BE49-F238E27FC236}">
-                <a16:creationId xmlns:a16="http://schemas.microsoft.com/office/drawing/2014/main" id="{637E6034-8644-4361-AC0F-EC88BD0D5A28}"/>
+                <a16:creationId xmlns:a16="http://schemas.microsoft.com/office/drawing/2014/main" id="{4F3895D7-75E8-4A6B-A788-51F976F7A247}"/>
               </a:ext>
             </a:extLst>
           </p:cNvPr>
@@ -2557,7 +2557,7 @@
           <p:cNvPr id="9" name="Content-Placeholder-15-10">
             <a:extLst xmlns:a="http://schemas.openxmlformats.org/drawingml/2006/main">
               <a:ext uri="{FF2B5EF4-FFF2-40B4-BE49-F238E27FC236}">
-                <a16:creationId xmlns:a16="http://schemas.microsoft.com/office/drawing/2014/main" id="{638C0874-056B-45B1-8EB4-18E7A452D972}"/>
+                <a16:creationId xmlns:a16="http://schemas.microsoft.com/office/drawing/2014/main" id="{314A43AE-EF41-4D3F-AEDC-EAB88F96A3DB}"/>
               </a:ext>
             </a:extLst>
           </p:cNvPr>
@@ -2602,7 +2602,7 @@
           <p:cNvPr id="10" name="Text-Placeholder-16-11">
             <a:extLst xmlns:a="http://schemas.openxmlformats.org/drawingml/2006/main">
               <a:ext uri="{FF2B5EF4-FFF2-40B4-BE49-F238E27FC236}">
-                <a16:creationId xmlns:a16="http://schemas.microsoft.com/office/drawing/2014/main" id="{8A07E341-D13D-4567-B09F-412FEBEB798A}"/>
+                <a16:creationId xmlns:a16="http://schemas.microsoft.com/office/drawing/2014/main" id="{3E103449-6C20-4EEE-93A3-D79E1C81A14C}"/>
               </a:ext>
             </a:extLst>
           </p:cNvPr>
@@ -2663,7 +2663,7 @@
           <p:cNvPr id="11" name="Text-Placeholder-16-12">
             <a:extLst xmlns:a="http://schemas.openxmlformats.org/drawingml/2006/main">
               <a:ext uri="{FF2B5EF4-FFF2-40B4-BE49-F238E27FC236}">
-                <a16:creationId xmlns:a16="http://schemas.microsoft.com/office/drawing/2014/main" id="{D587F28C-2270-4FB5-9E34-22A1CA0686B6}"/>
+                <a16:creationId xmlns:a16="http://schemas.microsoft.com/office/drawing/2014/main" id="{E870A1C1-E309-4194-838B-8817BDECBC0A}"/>
               </a:ext>
             </a:extLst>
           </p:cNvPr>
@@ -2724,7 +2724,7 @@
           <p:cNvPr id="12" name="Text-Placeholder-16-13">
             <a:extLst xmlns:a="http://schemas.openxmlformats.org/drawingml/2006/main">
               <a:ext uri="{FF2B5EF4-FFF2-40B4-BE49-F238E27FC236}">
-                <a16:creationId xmlns:a16="http://schemas.microsoft.com/office/drawing/2014/main" id="{4FBC3061-D521-4BA6-A893-5D4D64EB76C8}"/>
+                <a16:creationId xmlns:a16="http://schemas.microsoft.com/office/drawing/2014/main" id="{C4D5241A-1B1A-45ED-8626-BBB3044EFA9A}"/>
               </a:ext>
             </a:extLst>
           </p:cNvPr>
@@ -2783,7 +2783,7 @@
     </p:spTree>
     <p:extLst>
       <p:ext uri="{BB962C8B-B14F-4D97-AF65-F5344CB8AC3E}">
-        <p14:creationId xmlns:p14="http://schemas.microsoft.com/office/powerpoint/2010/main" val="1910932591"/>
+        <p14:creationId xmlns:p14="http://schemas.microsoft.com/office/powerpoint/2010/main" val="1331606920"/>
       </p:ext>
     </p:extLst>
   </p:cSld>
@@ -2807,7 +2807,7 @@
           <p:cNvPr id="6" name="Google-Shape-532-p58-2">
             <a:extLst xmlns:a="http://schemas.openxmlformats.org/drawingml/2006/main">
               <a:ext uri="{FF2B5EF4-FFF2-40B4-BE49-F238E27FC236}">
-                <a16:creationId xmlns:a16="http://schemas.microsoft.com/office/drawing/2014/main" id="{04C551DF-0C74-4322-90E6-7B805FE7A02B}"/>
+                <a16:creationId xmlns:a16="http://schemas.microsoft.com/office/drawing/2014/main" id="{474BA0F3-C920-4F04-9370-29FC38723212}"/>
               </a:ext>
             </a:extLst>
           </p:cNvPr>
@@ -2852,7 +2852,7 @@
           <p:cNvPr id="2" name="Google-Shape-533-p58-3">
             <a:extLst xmlns:a="http://schemas.openxmlformats.org/drawingml/2006/main">
               <a:ext uri="{FF2B5EF4-FFF2-40B4-BE49-F238E27FC236}">
-                <a16:creationId xmlns:a16="http://schemas.microsoft.com/office/drawing/2014/main" id="{E590EF62-F243-4496-BD80-50E4A88A6899}"/>
+                <a16:creationId xmlns:a16="http://schemas.microsoft.com/office/drawing/2014/main" id="{617D14AA-3C1F-4122-9410-5205184F3F1D}"/>
               </a:ext>
             </a:extLst>
           </p:cNvPr>
@@ -2897,7 +2897,7 @@
           <p:cNvPr id="3" name="Google-Shape-534-p58-4">
             <a:extLst xmlns:a="http://schemas.openxmlformats.org/drawingml/2006/main">
               <a:ext uri="{FF2B5EF4-FFF2-40B4-BE49-F238E27FC236}">
-                <a16:creationId xmlns:a16="http://schemas.microsoft.com/office/drawing/2014/main" id="{BAD99CEF-8ABB-43A7-91EE-7BE31D154AB0}"/>
+                <a16:creationId xmlns:a16="http://schemas.microsoft.com/office/drawing/2014/main" id="{CB3E03B0-9EA9-4533-A6D3-3983E78599CE}"/>
               </a:ext>
             </a:extLst>
           </p:cNvPr>
@@ -2958,7 +2958,7 @@
           <p:cNvPr id="4" name="Content-Placeholder-1-5">
             <a:extLst xmlns:a="http://schemas.openxmlformats.org/drawingml/2006/main">
               <a:ext uri="{FF2B5EF4-FFF2-40B4-BE49-F238E27FC236}">
-                <a16:creationId xmlns:a16="http://schemas.microsoft.com/office/drawing/2014/main" id="{49FE0AF1-65CD-45A3-94C2-12B3C79E4A29}"/>
+                <a16:creationId xmlns:a16="http://schemas.microsoft.com/office/drawing/2014/main" id="{A72B48BD-DDB4-4CF7-8703-B484EA483937}"/>
               </a:ext>
             </a:extLst>
           </p:cNvPr>
@@ -3019,7 +3019,7 @@
           <p:cNvPr id="5" name="Content-Placeholder-2-6">
             <a:extLst xmlns:a="http://schemas.openxmlformats.org/drawingml/2006/main">
               <a:ext uri="{FF2B5EF4-FFF2-40B4-BE49-F238E27FC236}">
-                <a16:creationId xmlns:a16="http://schemas.microsoft.com/office/drawing/2014/main" id="{829229F8-137A-417B-B780-9759B087ED76}"/>
+                <a16:creationId xmlns:a16="http://schemas.microsoft.com/office/drawing/2014/main" id="{05175D87-D6D0-4563-AEBD-502FE44E4DA1}"/>
               </a:ext>
             </a:extLst>
           </p:cNvPr>
@@ -3078,7 +3078,7 @@
     </p:spTree>
     <p:extLst>
       <p:ext uri="{BB962C8B-B14F-4D97-AF65-F5344CB8AC3E}">
-        <p14:creationId xmlns:p14="http://schemas.microsoft.com/office/powerpoint/2010/main" val="1484972904"/>
+        <p14:creationId xmlns:p14="http://schemas.microsoft.com/office/powerpoint/2010/main" val="328502677"/>
       </p:ext>
     </p:extLst>
   </p:cSld>
@@ -3102,7 +3102,7 @@
           <p:cNvPr id="13" name="Rounded-Rectangle-5-1">
             <a:extLst xmlns:a="http://schemas.openxmlformats.org/drawingml/2006/main">
               <a:ext uri="{FF2B5EF4-FFF2-40B4-BE49-F238E27FC236}">
-                <a16:creationId xmlns:a16="http://schemas.microsoft.com/office/drawing/2014/main" id="{9E981FA7-42DC-4C1E-8352-254D417AF724}"/>
+                <a16:creationId xmlns:a16="http://schemas.microsoft.com/office/drawing/2014/main" id="{48619150-0944-46AA-8FA5-DBC2ED354C5E}"/>
               </a:ext>
             </a:extLst>
           </p:cNvPr>
@@ -3131,7 +3131,7 @@
           <p:cNvPr id="2" name="Rounded-Rectangle-6-2">
             <a:extLst xmlns:a="http://schemas.openxmlformats.org/drawingml/2006/main">
               <a:ext uri="{FF2B5EF4-FFF2-40B4-BE49-F238E27FC236}">
-                <a16:creationId xmlns:a16="http://schemas.microsoft.com/office/drawing/2014/main" id="{6A58BA35-0401-4A80-9B5E-C642E158EB3D}"/>
+                <a16:creationId xmlns:a16="http://schemas.microsoft.com/office/drawing/2014/main" id="{1B093577-AA27-4A28-9FA9-95391F208396}"/>
               </a:ext>
             </a:extLst>
           </p:cNvPr>
@@ -3160,7 +3160,7 @@
           <p:cNvPr id="3" name="Rounded-Rectangle-7-3">
             <a:extLst xmlns:a="http://schemas.openxmlformats.org/drawingml/2006/main">
               <a:ext uri="{FF2B5EF4-FFF2-40B4-BE49-F238E27FC236}">
-                <a16:creationId xmlns:a16="http://schemas.microsoft.com/office/drawing/2014/main" id="{ED039ED0-3E4E-4080-B6DD-EBDC4FDC0BB7}"/>
+                <a16:creationId xmlns:a16="http://schemas.microsoft.com/office/drawing/2014/main" id="{37F7AC29-C0E3-4254-8D58-FB1C36261A63}"/>
               </a:ext>
             </a:extLst>
           </p:cNvPr>
@@ -3189,7 +3189,7 @@
           <p:cNvPr id="4" name="Slide-Number-Placeholder-1-4">
             <a:extLst xmlns:a="http://schemas.openxmlformats.org/drawingml/2006/main">
               <a:ext uri="{FF2B5EF4-FFF2-40B4-BE49-F238E27FC236}">
-                <a16:creationId xmlns:a16="http://schemas.microsoft.com/office/drawing/2014/main" id="{9F4A5325-E8FF-4346-94F0-CA6C40F5B393}"/>
+                <a16:creationId xmlns:a16="http://schemas.microsoft.com/office/drawing/2014/main" id="{3A13857F-3D3E-4968-8AF2-A00DF94B8E75}"/>
               </a:ext>
             </a:extLst>
           </p:cNvPr>
@@ -3232,7 +3232,7 @@
           <p:cNvPr id="5" name="Title-2-5">
             <a:extLst xmlns:a="http://schemas.openxmlformats.org/drawingml/2006/main">
               <a:ext uri="{FF2B5EF4-FFF2-40B4-BE49-F238E27FC236}">
-                <a16:creationId xmlns:a16="http://schemas.microsoft.com/office/drawing/2014/main" id="{EAC96CDB-7F57-46B2-9387-53D158C64C79}"/>
+                <a16:creationId xmlns:a16="http://schemas.microsoft.com/office/drawing/2014/main" id="{FD01C429-E806-4BD3-B6CA-DA6324E69BC1}"/>
               </a:ext>
             </a:extLst>
           </p:cNvPr>
@@ -3277,7 +3277,7 @@
           <p:cNvPr id="6" name="Content-Placeholder-9-6">
             <a:extLst xmlns:a="http://schemas.openxmlformats.org/drawingml/2006/main">
               <a:ext uri="{FF2B5EF4-FFF2-40B4-BE49-F238E27FC236}">
-                <a16:creationId xmlns:a16="http://schemas.microsoft.com/office/drawing/2014/main" id="{686F6F63-83FD-4CE4-BE7D-27F5A145A753}"/>
+                <a16:creationId xmlns:a16="http://schemas.microsoft.com/office/drawing/2014/main" id="{51EE8793-8FC9-4159-9CA6-C9DED334E3D0}"/>
               </a:ext>
             </a:extLst>
           </p:cNvPr>
@@ -3323,7 +3323,7 @@
           <p:cNvPr id="7" name="Content-Placeholder-10-7">
             <a:extLst xmlns:a="http://schemas.openxmlformats.org/drawingml/2006/main">
               <a:ext uri="{FF2B5EF4-FFF2-40B4-BE49-F238E27FC236}">
-                <a16:creationId xmlns:a16="http://schemas.microsoft.com/office/drawing/2014/main" id="{23BC2B9F-824C-47A9-916E-C7D91B8DA032}"/>
+                <a16:creationId xmlns:a16="http://schemas.microsoft.com/office/drawing/2014/main" id="{A08C6662-6FB7-4454-85AD-6E92D9683839}"/>
               </a:ext>
             </a:extLst>
           </p:cNvPr>
@@ -3369,7 +3369,7 @@
           <p:cNvPr id="8" name="Content-Placeholder-11-8">
             <a:extLst xmlns:a="http://schemas.openxmlformats.org/drawingml/2006/main">
               <a:ext uri="{FF2B5EF4-FFF2-40B4-BE49-F238E27FC236}">
-                <a16:creationId xmlns:a16="http://schemas.microsoft.com/office/drawing/2014/main" id="{1527E633-E768-4013-8E83-6EAC2F05A927}"/>
+                <a16:creationId xmlns:a16="http://schemas.microsoft.com/office/drawing/2014/main" id="{871CBBB3-CF9F-4FED-A5F2-A10DCBBF20E7}"/>
               </a:ext>
             </a:extLst>
           </p:cNvPr>
@@ -3415,7 +3415,7 @@
           <p:cNvPr id="9" name="Content-Placeholder-9-9">
             <a:extLst xmlns:a="http://schemas.openxmlformats.org/drawingml/2006/main">
               <a:ext uri="{FF2B5EF4-FFF2-40B4-BE49-F238E27FC236}">
-                <a16:creationId xmlns:a16="http://schemas.microsoft.com/office/drawing/2014/main" id="{4C65BA8F-42C3-46CD-80E7-AE35C3B4E22B}"/>
+                <a16:creationId xmlns:a16="http://schemas.microsoft.com/office/drawing/2014/main" id="{161C8DD7-6019-4B58-AA30-13E94FA0DCB9}"/>
               </a:ext>
             </a:extLst>
           </p:cNvPr>
@@ -3460,7 +3460,7 @@
           <p:cNvPr id="10" name="Content-Placeholder-9-10">
             <a:extLst xmlns:a="http://schemas.openxmlformats.org/drawingml/2006/main">
               <a:ext uri="{FF2B5EF4-FFF2-40B4-BE49-F238E27FC236}">
-                <a16:creationId xmlns:a16="http://schemas.microsoft.com/office/drawing/2014/main" id="{2A154F43-D742-4B55-B06E-8DB9130D3810}"/>
+                <a16:creationId xmlns:a16="http://schemas.microsoft.com/office/drawing/2014/main" id="{F5CC867F-E120-40C4-B9E4-2668228E9FA2}"/>
               </a:ext>
             </a:extLst>
           </p:cNvPr>
@@ -3505,7 +3505,7 @@
           <p:cNvPr id="11" name="Content-Placeholder-9-11">
             <a:extLst xmlns:a="http://schemas.openxmlformats.org/drawingml/2006/main">
               <a:ext uri="{FF2B5EF4-FFF2-40B4-BE49-F238E27FC236}">
-                <a16:creationId xmlns:a16="http://schemas.microsoft.com/office/drawing/2014/main" id="{A811131F-F3AE-4D31-B667-6F16DBF01121}"/>
+                <a16:creationId xmlns:a16="http://schemas.microsoft.com/office/drawing/2014/main" id="{06A62E0C-535C-4866-8EBC-1800FE5EE230}"/>
               </a:ext>
             </a:extLst>
           </p:cNvPr>
@@ -3550,7 +3550,7 @@
           <p:cNvPr id="12" name="Content-Placeholder-15-12">
             <a:extLst xmlns:a="http://schemas.openxmlformats.org/drawingml/2006/main">
               <a:ext uri="{FF2B5EF4-FFF2-40B4-BE49-F238E27FC236}">
-                <a16:creationId xmlns:a16="http://schemas.microsoft.com/office/drawing/2014/main" id="{15CB0C65-4E73-4C55-9EFD-C0EA100362C2}"/>
+                <a16:creationId xmlns:a16="http://schemas.microsoft.com/office/drawing/2014/main" id="{71C56EE5-8F0B-4CDB-A2AA-21766897EABD}"/>
               </a:ext>
             </a:extLst>
           </p:cNvPr>
@@ -3608,7 +3608,7 @@
     </p:spTree>
     <p:extLst>
       <p:ext uri="{BB962C8B-B14F-4D97-AF65-F5344CB8AC3E}">
-        <p14:creationId xmlns:p14="http://schemas.microsoft.com/office/powerpoint/2010/main" val="2067917219"/>
+        <p14:creationId xmlns:p14="http://schemas.microsoft.com/office/powerpoint/2010/main" val="1989471059"/>
       </p:ext>
     </p:extLst>
   </p:cSld>
@@ -3632,7 +3632,7 @@
           <p:cNvPr id="13" name="Slide-Number-Placeholder-3-2">
             <a:extLst xmlns:a="http://schemas.openxmlformats.org/drawingml/2006/main">
               <a:ext uri="{FF2B5EF4-FFF2-40B4-BE49-F238E27FC236}">
-                <a16:creationId xmlns:a16="http://schemas.microsoft.com/office/drawing/2014/main" id="{9327BA22-EFCE-491C-82D5-F6F4CB747086}"/>
+                <a16:creationId xmlns:a16="http://schemas.microsoft.com/office/drawing/2014/main" id="{3A9C2C46-CC2C-4197-9EC6-0A0FF11B346B}"/>
               </a:ext>
             </a:extLst>
           </p:cNvPr>
@@ -3675,7 +3675,7 @@
           <p:cNvPr id="2" name="Title-10-3">
             <a:extLst xmlns:a="http://schemas.openxmlformats.org/drawingml/2006/main">
               <a:ext uri="{FF2B5EF4-FFF2-40B4-BE49-F238E27FC236}">
-                <a16:creationId xmlns:a16="http://schemas.microsoft.com/office/drawing/2014/main" id="{E9C0BA03-7A77-4419-98F5-E335C0856085}"/>
+                <a16:creationId xmlns:a16="http://schemas.microsoft.com/office/drawing/2014/main" id="{508D72E9-930C-45A8-8D01-C2FD6BE3B2A9}"/>
               </a:ext>
             </a:extLst>
           </p:cNvPr>
@@ -3742,7 +3742,7 @@
           <p:cNvPr id="4" name="Google-Shape-2260-p159-5">
             <a:extLst xmlns:a="http://schemas.openxmlformats.org/drawingml/2006/main">
               <a:ext uri="{FF2B5EF4-FFF2-40B4-BE49-F238E27FC236}">
-                <a16:creationId xmlns:a16="http://schemas.microsoft.com/office/drawing/2014/main" id="{EB5ECE25-3E90-49B2-B3E3-A8A4C9B28216}"/>
+                <a16:creationId xmlns:a16="http://schemas.microsoft.com/office/drawing/2014/main" id="{DEC043E4-F87D-4180-A500-09BD146FEEA0}"/>
               </a:ext>
             </a:extLst>
           </p:cNvPr>
@@ -3769,7 +3769,7 @@
           <p:cNvPr id="5" name="Google-Shape-2261-p159-6">
             <a:extLst xmlns:a="http://schemas.openxmlformats.org/drawingml/2006/main">
               <a:ext uri="{FF2B5EF4-FFF2-40B4-BE49-F238E27FC236}">
-                <a16:creationId xmlns:a16="http://schemas.microsoft.com/office/drawing/2014/main" id="{4965F87C-91BD-47A4-A48A-6991C8E78AD2}"/>
+                <a16:creationId xmlns:a16="http://schemas.microsoft.com/office/drawing/2014/main" id="{E97342F0-4658-420E-BD3D-71CA0B7F6586}"/>
               </a:ext>
             </a:extLst>
           </p:cNvPr>
@@ -3796,7 +3796,7 @@
           <p:cNvPr id="6" name="Google-Shape-2262-p159-7">
             <a:extLst xmlns:a="http://schemas.openxmlformats.org/drawingml/2006/main">
               <a:ext uri="{FF2B5EF4-FFF2-40B4-BE49-F238E27FC236}">
-                <a16:creationId xmlns:a16="http://schemas.microsoft.com/office/drawing/2014/main" id="{C15B57BD-FCEF-4DBE-A138-69873C921ECF}"/>
+                <a16:creationId xmlns:a16="http://schemas.microsoft.com/office/drawing/2014/main" id="{3EE3678F-3DEE-48C9-9702-F06205B1D5F3}"/>
               </a:ext>
             </a:extLst>
           </p:cNvPr>
@@ -3823,7 +3823,7 @@
           <p:cNvPr id="7" name="Content-Placeholder-15-8">
             <a:extLst xmlns:a="http://schemas.openxmlformats.org/drawingml/2006/main">
               <a:ext uri="{FF2B5EF4-FFF2-40B4-BE49-F238E27FC236}">
-                <a16:creationId xmlns:a16="http://schemas.microsoft.com/office/drawing/2014/main" id="{D69A9EF6-5BC2-4299-AFF8-0206AEEDA197}"/>
+                <a16:creationId xmlns:a16="http://schemas.microsoft.com/office/drawing/2014/main" id="{1657E66E-685C-4643-95E3-3B3CC92BEDBC}"/>
               </a:ext>
             </a:extLst>
           </p:cNvPr>
@@ -3868,7 +3868,7 @@
           <p:cNvPr id="8" name="Content-Placeholder-15-9">
             <a:extLst xmlns:a="http://schemas.openxmlformats.org/drawingml/2006/main">
               <a:ext uri="{FF2B5EF4-FFF2-40B4-BE49-F238E27FC236}">
-                <a16:creationId xmlns:a16="http://schemas.microsoft.com/office/drawing/2014/main" id="{A5EF1F03-2D5A-4D51-8715-6054EBAFBB64}"/>
+                <a16:creationId xmlns:a16="http://schemas.microsoft.com/office/drawing/2014/main" id="{7ADC840E-FD35-4A13-A896-4AE183E3C014}"/>
               </a:ext>
             </a:extLst>
           </p:cNvPr>
@@ -3913,7 +3913,7 @@
           <p:cNvPr id="9" name="Content-Placeholder-15-10">
             <a:extLst xmlns:a="http://schemas.openxmlformats.org/drawingml/2006/main">
               <a:ext uri="{FF2B5EF4-FFF2-40B4-BE49-F238E27FC236}">
-                <a16:creationId xmlns:a16="http://schemas.microsoft.com/office/drawing/2014/main" id="{E35E44D8-58A3-411F-B240-522ABABE8F96}"/>
+                <a16:creationId xmlns:a16="http://schemas.microsoft.com/office/drawing/2014/main" id="{D256FC5A-73C7-4686-9BBC-0FEFBCC749B3}"/>
               </a:ext>
             </a:extLst>
           </p:cNvPr>
@@ -3958,7 +3958,7 @@
           <p:cNvPr id="10" name="Text-Placeholder-16-11">
             <a:extLst xmlns:a="http://schemas.openxmlformats.org/drawingml/2006/main">
               <a:ext uri="{FF2B5EF4-FFF2-40B4-BE49-F238E27FC236}">
-                <a16:creationId xmlns:a16="http://schemas.microsoft.com/office/drawing/2014/main" id="{74E2D268-30A4-4DBF-B4CA-8E7D9022B9B1}"/>
+                <a16:creationId xmlns:a16="http://schemas.microsoft.com/office/drawing/2014/main" id="{A234125B-3274-4A46-8FFB-B18CCA796B59}"/>
               </a:ext>
             </a:extLst>
           </p:cNvPr>
@@ -4019,7 +4019,7 @@
           <p:cNvPr id="11" name="Text-Placeholder-16-12">
             <a:extLst xmlns:a="http://schemas.openxmlformats.org/drawingml/2006/main">
               <a:ext uri="{FF2B5EF4-FFF2-40B4-BE49-F238E27FC236}">
-                <a16:creationId xmlns:a16="http://schemas.microsoft.com/office/drawing/2014/main" id="{A2ED67F6-552D-4D35-B7DF-ECD8CE56D58D}"/>
+                <a16:creationId xmlns:a16="http://schemas.microsoft.com/office/drawing/2014/main" id="{655EBC03-ACE4-44AD-BF3D-DE750E56180B}"/>
               </a:ext>
             </a:extLst>
           </p:cNvPr>
@@ -4080,7 +4080,7 @@
           <p:cNvPr id="12" name="Text-Placeholder-16-13">
             <a:extLst xmlns:a="http://schemas.openxmlformats.org/drawingml/2006/main">
               <a:ext uri="{FF2B5EF4-FFF2-40B4-BE49-F238E27FC236}">
-                <a16:creationId xmlns:a16="http://schemas.microsoft.com/office/drawing/2014/main" id="{76FF5029-D480-4751-A97A-6B91561A47F3}"/>
+                <a16:creationId xmlns:a16="http://schemas.microsoft.com/office/drawing/2014/main" id="{31FCBEA4-41FF-4CD8-8BE3-468DB5E948E7}"/>
               </a:ext>
             </a:extLst>
           </p:cNvPr>
@@ -4139,7 +4139,7 @@
     </p:spTree>
     <p:extLst>
       <p:ext uri="{BB962C8B-B14F-4D97-AF65-F5344CB8AC3E}">
-        <p14:creationId xmlns:p14="http://schemas.microsoft.com/office/powerpoint/2010/main" val="57050945"/>
+        <p14:creationId xmlns:p14="http://schemas.microsoft.com/office/powerpoint/2010/main" val="1731927811"/>
       </p:ext>
     </p:extLst>
   </p:cSld>
@@ -4163,7 +4163,7 @@
           <p:cNvPr id="6" name="Google-Shape-532-p58-2">
             <a:extLst xmlns:a="http://schemas.openxmlformats.org/drawingml/2006/main">
               <a:ext uri="{FF2B5EF4-FFF2-40B4-BE49-F238E27FC236}">
-                <a16:creationId xmlns:a16="http://schemas.microsoft.com/office/drawing/2014/main" id="{8B0A74BD-336C-4744-995C-41A969E73D95}"/>
+                <a16:creationId xmlns:a16="http://schemas.microsoft.com/office/drawing/2014/main" id="{76E44529-8911-447D-B17E-3262E9CF7CA3}"/>
               </a:ext>
             </a:extLst>
           </p:cNvPr>
@@ -4208,7 +4208,7 @@
           <p:cNvPr id="2" name="Google-Shape-533-p58-3">
             <a:extLst xmlns:a="http://schemas.openxmlformats.org/drawingml/2006/main">
               <a:ext uri="{FF2B5EF4-FFF2-40B4-BE49-F238E27FC236}">
-                <a16:creationId xmlns:a16="http://schemas.microsoft.com/office/drawing/2014/main" id="{E14BE3D8-D138-4288-9FC7-4DDB3765025F}"/>
+                <a16:creationId xmlns:a16="http://schemas.microsoft.com/office/drawing/2014/main" id="{FC69C3FE-9132-4D29-951C-51C0EDDE8EE2}"/>
               </a:ext>
             </a:extLst>
           </p:cNvPr>
@@ -4253,7 +4253,7 @@
           <p:cNvPr id="3" name="Google-Shape-534-p58-4">
             <a:extLst xmlns:a="http://schemas.openxmlformats.org/drawingml/2006/main">
               <a:ext uri="{FF2B5EF4-FFF2-40B4-BE49-F238E27FC236}">
-                <a16:creationId xmlns:a16="http://schemas.microsoft.com/office/drawing/2014/main" id="{AC7E687C-7A61-4484-A9E9-9974C0F2E14B}"/>
+                <a16:creationId xmlns:a16="http://schemas.microsoft.com/office/drawing/2014/main" id="{A5B33112-0686-4EDD-88EB-C78666157BCF}"/>
               </a:ext>
             </a:extLst>
           </p:cNvPr>
@@ -4314,7 +4314,7 @@
           <p:cNvPr id="4" name="Content-Placeholder-1-5">
             <a:extLst xmlns:a="http://schemas.openxmlformats.org/drawingml/2006/main">
               <a:ext uri="{FF2B5EF4-FFF2-40B4-BE49-F238E27FC236}">
-                <a16:creationId xmlns:a16="http://schemas.microsoft.com/office/drawing/2014/main" id="{5746401E-E029-459D-8B21-2FE69D7AAE7E}"/>
+                <a16:creationId xmlns:a16="http://schemas.microsoft.com/office/drawing/2014/main" id="{A72E443E-DD8F-49FD-9E60-242D12CA5834}"/>
               </a:ext>
             </a:extLst>
           </p:cNvPr>
@@ -4375,7 +4375,7 @@
           <p:cNvPr id="5" name="Content-Placeholder-2-6">
             <a:extLst xmlns:a="http://schemas.openxmlformats.org/drawingml/2006/main">
               <a:ext uri="{FF2B5EF4-FFF2-40B4-BE49-F238E27FC236}">
-                <a16:creationId xmlns:a16="http://schemas.microsoft.com/office/drawing/2014/main" id="{BE43D100-B577-4DF4-9264-6CC44C391C77}"/>
+                <a16:creationId xmlns:a16="http://schemas.microsoft.com/office/drawing/2014/main" id="{53BADF1B-8916-42BB-A1C6-CDC999FCF44B}"/>
               </a:ext>
             </a:extLst>
           </p:cNvPr>
@@ -4434,7 +4434,7 @@
     </p:spTree>
     <p:extLst>
       <p:ext uri="{BB962C8B-B14F-4D97-AF65-F5344CB8AC3E}">
-        <p14:creationId xmlns:p14="http://schemas.microsoft.com/office/powerpoint/2010/main" val="205871592"/>
+        <p14:creationId xmlns:p14="http://schemas.microsoft.com/office/powerpoint/2010/main" val="1236684463"/>
       </p:ext>
     </p:extLst>
   </p:cSld>
@@ -4458,7 +4458,7 @@
           <p:cNvPr id="4" name="Title-3-1">
             <a:extLst xmlns:a="http://schemas.openxmlformats.org/drawingml/2006/main">
               <a:ext uri="{FF2B5EF4-FFF2-40B4-BE49-F238E27FC236}">
-                <a16:creationId xmlns:a16="http://schemas.microsoft.com/office/drawing/2014/main" id="{CFBF10B5-FF7F-405D-B23F-56DA0DB54BEB}"/>
+                <a16:creationId xmlns:a16="http://schemas.microsoft.com/office/drawing/2014/main" id="{1D658B7A-7843-4DBE-810A-3FBCCD2F63C4}"/>
               </a:ext>
             </a:extLst>
           </p:cNvPr>
@@ -4494,7 +4494,7 @@
             </a:pPr>
             <a:r>
               <a:t>D0 PoC는 진행 완료
-D1 확장 전 ZDR·MAM 확인</a:t>
+D1 확장은 제품 보안심사</a:t>
             </a:r>
           </a:p>
         </p:txBody>
@@ -4504,7 +4504,7 @@
           <p:cNvPr id="2" name="Subtitle-4-2">
             <a:extLst xmlns:a="http://schemas.openxmlformats.org/drawingml/2006/main">
               <a:ext uri="{FF2B5EF4-FFF2-40B4-BE49-F238E27FC236}">
-                <a16:creationId xmlns:a16="http://schemas.microsoft.com/office/drawing/2014/main" id="{A4AD3893-D801-4575-9B53-9E9D23D96001}"/>
+                <a16:creationId xmlns:a16="http://schemas.microsoft.com/office/drawing/2014/main" id="{9A5929C5-1BF4-466A-ACCD-384A565725CF}"/>
               </a:ext>
             </a:extLst>
           </p:cNvPr>
@@ -4549,7 +4549,7 @@
           <p:cNvPr id="3" name="Subtitle-4-3">
             <a:extLst xmlns:a="http://schemas.openxmlformats.org/drawingml/2006/main">
               <a:ext uri="{FF2B5EF4-FFF2-40B4-BE49-F238E27FC236}">
-                <a16:creationId xmlns:a16="http://schemas.microsoft.com/office/drawing/2014/main" id="{0FF2A705-51DD-496D-8C83-A644D3E4CFA6}"/>
+                <a16:creationId xmlns:a16="http://schemas.microsoft.com/office/drawing/2014/main" id="{2E826246-F264-47C0-82A7-82C3CB2FC3F5}"/>
               </a:ext>
             </a:extLst>
           </p:cNvPr>
@@ -4584,7 +4584,7 @@
               </a:defRPr>
             </a:pPr>
             <a:r>
-              <a:t>Data Controls</a:t>
+              <a:t>제품 보안정책</a:t>
             </a:r>
           </a:p>
         </p:txBody>
@@ -4592,7 +4592,7 @@
     </p:spTree>
     <p:extLst>
       <p:ext uri="{BB962C8B-B14F-4D97-AF65-F5344CB8AC3E}">
-        <p14:creationId xmlns:p14="http://schemas.microsoft.com/office/powerpoint/2010/main" val="1425132470"/>
+        <p14:creationId xmlns:p14="http://schemas.microsoft.com/office/powerpoint/2010/main" val="530992738"/>
       </p:ext>
     </p:extLst>
   </p:cSld>
@@ -4616,7 +4616,7 @@
           <p:cNvPr id="6" name="Google-Shape-532-p58-2">
             <a:extLst xmlns:a="http://schemas.openxmlformats.org/drawingml/2006/main">
               <a:ext uri="{FF2B5EF4-FFF2-40B4-BE49-F238E27FC236}">
-                <a16:creationId xmlns:a16="http://schemas.microsoft.com/office/drawing/2014/main" id="{AFD42B4B-6089-4021-B5DD-DED924C0D1CB}"/>
+                <a16:creationId xmlns:a16="http://schemas.microsoft.com/office/drawing/2014/main" id="{D2FB13CE-93BA-4A65-BC7A-AE3C7FF6D672}"/>
               </a:ext>
             </a:extLst>
           </p:cNvPr>
@@ -4661,7 +4661,7 @@
           <p:cNvPr id="2" name="Google-Shape-533-p58-3">
             <a:extLst xmlns:a="http://schemas.openxmlformats.org/drawingml/2006/main">
               <a:ext uri="{FF2B5EF4-FFF2-40B4-BE49-F238E27FC236}">
-                <a16:creationId xmlns:a16="http://schemas.microsoft.com/office/drawing/2014/main" id="{51DE73A8-CCB9-4814-A200-53E47EB13F39}"/>
+                <a16:creationId xmlns:a16="http://schemas.microsoft.com/office/drawing/2014/main" id="{143A5BFC-4648-4DF0-A35F-E8AC544728C1}"/>
               </a:ext>
             </a:extLst>
           </p:cNvPr>
@@ -4706,7 +4706,7 @@
           <p:cNvPr id="3" name="Google-Shape-534-p58-4">
             <a:extLst xmlns:a="http://schemas.openxmlformats.org/drawingml/2006/main">
               <a:ext uri="{FF2B5EF4-FFF2-40B4-BE49-F238E27FC236}">
-                <a16:creationId xmlns:a16="http://schemas.microsoft.com/office/drawing/2014/main" id="{4C6E6A25-D8DE-4B9C-9604-1F19719B1CBA}"/>
+                <a16:creationId xmlns:a16="http://schemas.microsoft.com/office/drawing/2014/main" id="{64A0CF5C-4903-485A-945A-D6A27BEA4696}"/>
               </a:ext>
             </a:extLst>
           </p:cNvPr>
@@ -4767,7 +4767,7 @@
           <p:cNvPr id="4" name="Content-Placeholder-1-5">
             <a:extLst xmlns:a="http://schemas.openxmlformats.org/drawingml/2006/main">
               <a:ext uri="{FF2B5EF4-FFF2-40B4-BE49-F238E27FC236}">
-                <a16:creationId xmlns:a16="http://schemas.microsoft.com/office/drawing/2014/main" id="{5646225C-FC9D-46FE-BD9F-171B9633B924}"/>
+                <a16:creationId xmlns:a16="http://schemas.microsoft.com/office/drawing/2014/main" id="{67C646D8-EC09-4A27-BE3B-8233506FD628}"/>
               </a:ext>
             </a:extLst>
           </p:cNvPr>
@@ -4828,7 +4828,7 @@
           <p:cNvPr id="5" name="Content-Placeholder-2-6">
             <a:extLst xmlns:a="http://schemas.openxmlformats.org/drawingml/2006/main">
               <a:ext uri="{FF2B5EF4-FFF2-40B4-BE49-F238E27FC236}">
-                <a16:creationId xmlns:a16="http://schemas.microsoft.com/office/drawing/2014/main" id="{2EA428D1-D41B-4092-8A12-9B41BA5D5B5B}"/>
+                <a16:creationId xmlns:a16="http://schemas.microsoft.com/office/drawing/2014/main" id="{A5A22B29-9350-48FC-9F9C-BED627631534}"/>
               </a:ext>
             </a:extLst>
           </p:cNvPr>
@@ -4863,7 +4863,7 @@
               </a:defRPr>
             </a:pPr>
             <a:r>
-              <a:t>운영자 확인</a:t>
+              <a:t>제품 보안정책</a:t>
             </a:r>
           </a:p>
           <a:p xmlns:a="http://schemas.openxmlformats.org/drawingml/2006/main">
@@ -4878,8 +4878,8 @@
               </a:defRPr>
             </a:pPr>
             <a:r>
-              <a:t>OpenAI Data Controls
-현재 API Key 회전</a:t>
+              <a:t>데이터 등급별 심사
+명시 요청 시 Key 회전</a:t>
             </a:r>
           </a:p>
         </p:txBody>
@@ -4887,7 +4887,7 @@
     </p:spTree>
     <p:extLst>
       <p:ext uri="{BB962C8B-B14F-4D97-AF65-F5344CB8AC3E}">
-        <p14:creationId xmlns:p14="http://schemas.microsoft.com/office/powerpoint/2010/main" val="580352756"/>
+        <p14:creationId xmlns:p14="http://schemas.microsoft.com/office/powerpoint/2010/main" val="1003622363"/>
       </p:ext>
     </p:extLst>
   </p:cSld>
